--- a/szakmaiprojekt_ppt.pptx
+++ b/szakmaiprojekt_ppt.pptx
@@ -10,10 +10,10 @@
   <p:sldIdLst>
     <p:sldId id="256" r:id="rId2"/>
     <p:sldId id="257" r:id="rId3"/>
-    <p:sldId id="258" r:id="rId4"/>
-    <p:sldId id="259" r:id="rId5"/>
-    <p:sldId id="260" r:id="rId6"/>
-    <p:sldId id="261" r:id="rId7"/>
+    <p:sldId id="261" r:id="rId4"/>
+    <p:sldId id="258" r:id="rId5"/>
+    <p:sldId id="259" r:id="rId6"/>
+    <p:sldId id="260" r:id="rId7"/>
   </p:sldIdLst>
   <p:sldSz cx="9144000" cy="5143500" type="screen16x9"/>
   <p:notesSz cx="5143500" cy="9144000"/>
@@ -1470,6 +1470,539 @@
 
 <file path=ppt/slides/slide3.xml><?xml version="1.0" encoding="utf-8"?>
 <p:sld xmlns:a="http://schemas.openxmlformats.org/drawingml/2006/main" xmlns:r="http://schemas.openxmlformats.org/officeDocument/2006/relationships" xmlns:p="http://schemas.openxmlformats.org/presentationml/2006/main">
+  <p:cSld name="Slide 6">
+    <p:bg>
+      <p:bgPr>
+        <a:solidFill>
+          <a:srgbClr val="EEF4F0"/>
+        </a:solidFill>
+        <a:effectLst/>
+      </p:bgPr>
+    </p:bg>
+    <p:spTree>
+      <p:nvGrpSpPr>
+        <p:cNvPr id="1" name=""/>
+        <p:cNvGrpSpPr/>
+        <p:nvPr/>
+      </p:nvGrpSpPr>
+      <p:grpSpPr>
+        <a:xfrm>
+          <a:off x="0" y="0"/>
+          <a:ext cx="0" cy="0"/>
+          <a:chOff x="0" y="0"/>
+          <a:chExt cx="0" cy="0"/>
+        </a:xfrm>
+      </p:grpSpPr>
+      <p:sp>
+        <p:nvSpPr>
+          <p:cNvPr id="2" name="Shape 0"/>
+          <p:cNvSpPr/>
+          <p:nvPr/>
+        </p:nvSpPr>
+        <p:spPr>
+          <a:xfrm>
+            <a:off x="0" y="0"/>
+            <a:ext cx="9144000" cy="164592"/>
+          </a:xfrm>
+          <a:prstGeom prst="rect">
+            <a:avLst/>
+          </a:prstGeom>
+          <a:solidFill>
+            <a:srgbClr val="1F5F46"/>
+          </a:solidFill>
+          <a:ln w="12700">
+            <a:solidFill>
+              <a:srgbClr val="1F5F46"/>
+            </a:solidFill>
+            <a:prstDash val="solid"/>
+          </a:ln>
+        </p:spPr>
+      </p:sp>
+      <p:sp>
+        <p:nvSpPr>
+          <p:cNvPr id="3" name="Text 1"/>
+          <p:cNvSpPr/>
+          <p:nvPr/>
+        </p:nvSpPr>
+        <p:spPr>
+          <a:xfrm>
+            <a:off x="548640" y="411480"/>
+            <a:ext cx="8046720" cy="822960"/>
+          </a:xfrm>
+          <a:prstGeom prst="rect">
+            <a:avLst/>
+          </a:prstGeom>
+          <a:noFill/>
+          <a:ln/>
+        </p:spPr>
+        <p:txBody>
+          <a:bodyPr wrap="square" lIns="0" tIns="0" rIns="0" bIns="0" rtlCol="0" anchor="ctr"/>
+          <a:lstStyle/>
+          <a:p>
+            <a:pPr marL="0" indent="0">
+              <a:buNone/>
+            </a:pPr>
+            <a:r>
+              <a:rPr lang="en-US" sz="3400" b="1" dirty="0">
+                <a:solidFill>
+                  <a:srgbClr val="1F5F46"/>
+                </a:solidFill>
+                <a:latin typeface="Calibri" pitchFamily="34" charset="0"/>
+                <a:ea typeface="Calibri" pitchFamily="34" charset="-122"/>
+                <a:cs typeface="Calibri" pitchFamily="34" charset="-120"/>
+              </a:rPr>
+              <a:t>Hol tartunk most?</a:t>
+            </a:r>
+            <a:endParaRPr lang="en-US" sz="3400" dirty="0"/>
+          </a:p>
+        </p:txBody>
+      </p:sp>
+      <p:sp>
+        <p:nvSpPr>
+          <p:cNvPr id="4" name="Shape 2"/>
+          <p:cNvSpPr/>
+          <p:nvPr/>
+        </p:nvSpPr>
+        <p:spPr>
+          <a:xfrm>
+            <a:off x="548640" y="1234440"/>
+            <a:ext cx="1097280" cy="64008"/>
+          </a:xfrm>
+          <a:prstGeom prst="rect">
+            <a:avLst/>
+          </a:prstGeom>
+          <a:solidFill>
+            <a:srgbClr val="F28C28"/>
+          </a:solidFill>
+          <a:ln w="12700">
+            <a:solidFill>
+              <a:srgbClr val="F28C28"/>
+            </a:solidFill>
+            <a:prstDash val="solid"/>
+          </a:ln>
+        </p:spPr>
+      </p:sp>
+      <p:sp>
+        <p:nvSpPr>
+          <p:cNvPr id="5" name="Shape 3"/>
+          <p:cNvSpPr/>
+          <p:nvPr/>
+        </p:nvSpPr>
+        <p:spPr>
+          <a:xfrm>
+            <a:off x="548640" y="1554480"/>
+            <a:ext cx="3931920" cy="502920"/>
+          </a:xfrm>
+          <a:prstGeom prst="rect">
+            <a:avLst/>
+          </a:prstGeom>
+          <a:solidFill>
+            <a:srgbClr val="1F5F46"/>
+          </a:solidFill>
+          <a:ln w="12700">
+            <a:solidFill>
+              <a:srgbClr val="1F5F46"/>
+            </a:solidFill>
+            <a:prstDash val="solid"/>
+          </a:ln>
+        </p:spPr>
+      </p:sp>
+      <p:sp>
+        <p:nvSpPr>
+          <p:cNvPr id="6" name="Text 4"/>
+          <p:cNvSpPr/>
+          <p:nvPr/>
+        </p:nvSpPr>
+        <p:spPr>
+          <a:xfrm>
+            <a:off x="731520" y="1554480"/>
+            <a:ext cx="3566160" cy="502920"/>
+          </a:xfrm>
+          <a:prstGeom prst="rect">
+            <a:avLst/>
+          </a:prstGeom>
+          <a:noFill/>
+          <a:ln/>
+        </p:spPr>
+        <p:txBody>
+          <a:bodyPr wrap="square" lIns="0" tIns="0" rIns="0" bIns="0" rtlCol="0" anchor="ctr"/>
+          <a:lstStyle/>
+          <a:p>
+            <a:pPr marL="0" indent="0">
+              <a:buNone/>
+            </a:pPr>
+            <a:r>
+              <a:rPr lang="en-US" sz="2000" b="1" dirty="0">
+                <a:solidFill>
+                  <a:srgbClr val="FFFFFF"/>
+                </a:solidFill>
+                <a:latin typeface="Calibri" pitchFamily="34" charset="0"/>
+                <a:ea typeface="Calibri" pitchFamily="34" charset="-122"/>
+                <a:cs typeface="Calibri" pitchFamily="34" charset="-120"/>
+              </a:rPr>
+              <a:t>Már megvan</a:t>
+            </a:r>
+            <a:endParaRPr lang="en-US" sz="2000" dirty="0"/>
+          </a:p>
+        </p:txBody>
+      </p:sp>
+      <p:sp>
+        <p:nvSpPr>
+          <p:cNvPr id="7" name="Shape 5"/>
+          <p:cNvSpPr/>
+          <p:nvPr/>
+        </p:nvSpPr>
+        <p:spPr>
+          <a:xfrm>
+            <a:off x="548640" y="2057400"/>
+            <a:ext cx="3931920" cy="2697480"/>
+          </a:xfrm>
+          <a:prstGeom prst="rect">
+            <a:avLst/>
+          </a:prstGeom>
+          <a:solidFill>
+            <a:srgbClr val="FFFFFF"/>
+          </a:solidFill>
+          <a:ln w="12700">
+            <a:solidFill>
+              <a:srgbClr val="C9D8CF"/>
+            </a:solidFill>
+            <a:prstDash val="solid"/>
+          </a:ln>
+        </p:spPr>
+      </p:sp>
+      <p:sp>
+        <p:nvSpPr>
+          <p:cNvPr id="8" name="Text 6"/>
+          <p:cNvSpPr/>
+          <p:nvPr/>
+        </p:nvSpPr>
+        <p:spPr>
+          <a:xfrm>
+            <a:off x="731520" y="2194560"/>
+            <a:ext cx="3566160" cy="2468880"/>
+          </a:xfrm>
+          <a:prstGeom prst="rect">
+            <a:avLst/>
+          </a:prstGeom>
+          <a:noFill/>
+          <a:ln/>
+        </p:spPr>
+        <p:txBody>
+          <a:bodyPr wrap="square" lIns="0" tIns="0" rIns="0" bIns="0" rtlCol="0" anchor="t"/>
+          <a:lstStyle/>
+          <a:p>
+            <a:pPr marL="342900" indent="-342900">
+              <a:spcAft>
+                <a:spcPts val="800"/>
+              </a:spcAft>
+              <a:buSzPct val="100000"/>
+              <a:buChar char="●"/>
+            </a:pPr>
+            <a:r>
+              <a:rPr lang="en-US" sz="1700" dirty="0">
+                <a:solidFill>
+                  <a:srgbClr val="222222"/>
+                </a:solidFill>
+                <a:latin typeface="Calibri" pitchFamily="34" charset="0"/>
+                <a:ea typeface="Calibri" pitchFamily="34" charset="-122"/>
+                <a:cs typeface="Calibri" pitchFamily="34" charset="-120"/>
+              </a:rPr>
+              <a:t>GitHub tároló létrehozva</a:t>
+            </a:r>
+            <a:endParaRPr lang="en-US" sz="1700" dirty="0"/>
+          </a:p>
+          <a:p>
+            <a:pPr marL="342900" indent="-342900">
+              <a:spcAft>
+                <a:spcPts val="800"/>
+              </a:spcAft>
+              <a:buSzPct val="100000"/>
+              <a:buChar char="●"/>
+            </a:pPr>
+            <a:r>
+              <a:rPr lang="en-US" sz="1700" dirty="0">
+                <a:solidFill>
+                  <a:srgbClr val="222222"/>
+                </a:solidFill>
+                <a:latin typeface="Calibri" pitchFamily="34" charset="0"/>
+                <a:ea typeface="Calibri" pitchFamily="34" charset="-122"/>
+                <a:cs typeface="Calibri" pitchFamily="34" charset="-120"/>
+              </a:rPr>
+              <a:t>Adatbázis megtervezve (7 tábla)</a:t>
+            </a:r>
+            <a:endParaRPr lang="en-US" sz="1700" dirty="0"/>
+          </a:p>
+          <a:p>
+            <a:pPr marL="342900" indent="-342900">
+              <a:spcAft>
+                <a:spcPts val="800"/>
+              </a:spcAft>
+              <a:buSzPct val="100000"/>
+              <a:buChar char="●"/>
+            </a:pPr>
+            <a:r>
+              <a:rPr lang="en-US" sz="1700" dirty="0">
+                <a:solidFill>
+                  <a:srgbClr val="222222"/>
+                </a:solidFill>
+                <a:latin typeface="Calibri" pitchFamily="34" charset="0"/>
+                <a:ea typeface="Calibri" pitchFamily="34" charset="-122"/>
+                <a:cs typeface="Calibri" pitchFamily="34" charset="-120"/>
+              </a:rPr>
+              <a:t>Kapcsolatok és EER diagram kész</a:t>
+            </a:r>
+            <a:endParaRPr lang="en-US" sz="1700" dirty="0"/>
+          </a:p>
+          <a:p>
+            <a:pPr marL="342900" indent="-342900">
+              <a:spcAft>
+                <a:spcPts val="800"/>
+              </a:spcAft>
+              <a:buSzPct val="100000"/>
+              <a:buChar char="●"/>
+            </a:pPr>
+            <a:r>
+              <a:rPr lang="en-US" sz="1700" dirty="0">
+                <a:solidFill>
+                  <a:srgbClr val="222222"/>
+                </a:solidFill>
+                <a:latin typeface="Calibri" pitchFamily="34" charset="0"/>
+                <a:ea typeface="Calibri" pitchFamily="34" charset="-122"/>
+                <a:cs typeface="Calibri" pitchFamily="34" charset="-120"/>
+              </a:rPr>
+              <a:t>Tesztadatok feltöltve</a:t>
+            </a:r>
+            <a:endParaRPr lang="en-US" sz="1700" dirty="0"/>
+          </a:p>
+        </p:txBody>
+      </p:sp>
+      <p:sp>
+        <p:nvSpPr>
+          <p:cNvPr id="9" name="Shape 7"/>
+          <p:cNvSpPr/>
+          <p:nvPr/>
+        </p:nvSpPr>
+        <p:spPr>
+          <a:xfrm>
+            <a:off x="4663440" y="1554480"/>
+            <a:ext cx="3931920" cy="502920"/>
+          </a:xfrm>
+          <a:prstGeom prst="rect">
+            <a:avLst/>
+          </a:prstGeom>
+          <a:solidFill>
+            <a:srgbClr val="F28C28"/>
+          </a:solidFill>
+          <a:ln w="12700">
+            <a:solidFill>
+              <a:srgbClr val="F28C28"/>
+            </a:solidFill>
+            <a:prstDash val="solid"/>
+          </a:ln>
+        </p:spPr>
+      </p:sp>
+      <p:sp>
+        <p:nvSpPr>
+          <p:cNvPr id="10" name="Text 8"/>
+          <p:cNvSpPr/>
+          <p:nvPr/>
+        </p:nvSpPr>
+        <p:spPr>
+          <a:xfrm>
+            <a:off x="4846320" y="1554480"/>
+            <a:ext cx="3566160" cy="502920"/>
+          </a:xfrm>
+          <a:prstGeom prst="rect">
+            <a:avLst/>
+          </a:prstGeom>
+          <a:noFill/>
+          <a:ln/>
+        </p:spPr>
+        <p:txBody>
+          <a:bodyPr wrap="square" lIns="0" tIns="0" rIns="0" bIns="0" rtlCol="0" anchor="ctr"/>
+          <a:lstStyle/>
+          <a:p>
+            <a:pPr marL="0" indent="0">
+              <a:buNone/>
+            </a:pPr>
+            <a:r>
+              <a:rPr lang="en-US" sz="2000" b="1" dirty="0">
+                <a:solidFill>
+                  <a:srgbClr val="FFFFFF"/>
+                </a:solidFill>
+                <a:latin typeface="Calibri" pitchFamily="34" charset="0"/>
+                <a:ea typeface="Calibri" pitchFamily="34" charset="-122"/>
+                <a:cs typeface="Calibri" pitchFamily="34" charset="-120"/>
+              </a:rPr>
+              <a:t>Még hátra van</a:t>
+            </a:r>
+            <a:endParaRPr lang="en-US" sz="2000" dirty="0"/>
+          </a:p>
+        </p:txBody>
+      </p:sp>
+      <p:sp>
+        <p:nvSpPr>
+          <p:cNvPr id="11" name="Shape 9"/>
+          <p:cNvSpPr/>
+          <p:nvPr/>
+        </p:nvSpPr>
+        <p:spPr>
+          <a:xfrm>
+            <a:off x="4663440" y="2057400"/>
+            <a:ext cx="3931920" cy="2697480"/>
+          </a:xfrm>
+          <a:prstGeom prst="rect">
+            <a:avLst/>
+          </a:prstGeom>
+          <a:solidFill>
+            <a:srgbClr val="FFFFFF"/>
+          </a:solidFill>
+          <a:ln w="12700">
+            <a:solidFill>
+              <a:srgbClr val="C9D8CF"/>
+            </a:solidFill>
+            <a:prstDash val="solid"/>
+          </a:ln>
+        </p:spPr>
+      </p:sp>
+      <p:sp>
+        <p:nvSpPr>
+          <p:cNvPr id="12" name="Text 10"/>
+          <p:cNvSpPr/>
+          <p:nvPr/>
+        </p:nvSpPr>
+        <p:spPr>
+          <a:xfrm>
+            <a:off x="4846320" y="2194560"/>
+            <a:ext cx="3566160" cy="2468880"/>
+          </a:xfrm>
+          <a:prstGeom prst="rect">
+            <a:avLst/>
+          </a:prstGeom>
+          <a:noFill/>
+          <a:ln/>
+        </p:spPr>
+        <p:txBody>
+          <a:bodyPr wrap="square" lIns="0" tIns="0" rIns="0" bIns="0" rtlCol="0" anchor="t"/>
+          <a:lstStyle/>
+          <a:p>
+            <a:pPr marL="342900" indent="-342900">
+              <a:spcAft>
+                <a:spcPts val="800"/>
+              </a:spcAft>
+              <a:buSzPct val="100000"/>
+              <a:buChar char="●"/>
+            </a:pPr>
+            <a:r>
+              <a:rPr lang="en-US" sz="1700" dirty="0">
+                <a:solidFill>
+                  <a:srgbClr val="222222"/>
+                </a:solidFill>
+                <a:latin typeface="Calibri" pitchFamily="34" charset="0"/>
+                <a:ea typeface="Calibri" pitchFamily="34" charset="-122"/>
+                <a:cs typeface="Calibri" pitchFamily="34" charset="-120"/>
+              </a:rPr>
+              <a:t>REST API (belépés, jogosultságok)</a:t>
+            </a:r>
+            <a:endParaRPr lang="en-US" sz="1700" dirty="0"/>
+          </a:p>
+          <a:p>
+            <a:pPr marL="342900" indent="-342900">
+              <a:spcAft>
+                <a:spcPts val="800"/>
+              </a:spcAft>
+              <a:buSzPct val="100000"/>
+              <a:buChar char="●"/>
+            </a:pPr>
+            <a:r>
+              <a:rPr lang="en-US" sz="1700" dirty="0">
+                <a:solidFill>
+                  <a:srgbClr val="222222"/>
+                </a:solidFill>
+                <a:latin typeface="Calibri" pitchFamily="34" charset="0"/>
+                <a:ea typeface="Calibri" pitchFamily="34" charset="-122"/>
+                <a:cs typeface="Calibri" pitchFamily="34" charset="-120"/>
+              </a:rPr>
+              <a:t>Weboldal: edzői és szülői felület</a:t>
+            </a:r>
+            <a:endParaRPr lang="en-US" sz="1700" dirty="0"/>
+          </a:p>
+          <a:p>
+            <a:pPr marL="342900" indent="-342900">
+              <a:spcAft>
+                <a:spcPts val="800"/>
+              </a:spcAft>
+              <a:buSzPct val="100000"/>
+              <a:buChar char="●"/>
+            </a:pPr>
+            <a:r>
+              <a:rPr lang="en-US" sz="1700" dirty="0">
+                <a:solidFill>
+                  <a:srgbClr val="222222"/>
+                </a:solidFill>
+                <a:latin typeface="Calibri" pitchFamily="34" charset="0"/>
+                <a:ea typeface="Calibri" pitchFamily="34" charset="-122"/>
+                <a:cs typeface="Calibri" pitchFamily="34" charset="-120"/>
+              </a:rPr>
+              <a:t>Tesztelés</a:t>
+            </a:r>
+            <a:endParaRPr lang="en-US" sz="1700" dirty="0"/>
+          </a:p>
+          <a:p>
+            <a:pPr marL="342900" indent="-342900">
+              <a:spcAft>
+                <a:spcPts val="800"/>
+              </a:spcAft>
+              <a:buSzPct val="100000"/>
+              <a:buChar char="●"/>
+            </a:pPr>
+            <a:r>
+              <a:rPr lang="en-US" sz="1700" dirty="0">
+                <a:solidFill>
+                  <a:srgbClr val="222222"/>
+                </a:solidFill>
+                <a:latin typeface="Calibri" pitchFamily="34" charset="0"/>
+                <a:ea typeface="Calibri" pitchFamily="34" charset="-122"/>
+                <a:cs typeface="Calibri" pitchFamily="34" charset="-120"/>
+              </a:rPr>
+              <a:t>Dokumentáció</a:t>
+            </a:r>
+            <a:endParaRPr lang="en-US" sz="1700" dirty="0"/>
+          </a:p>
+          <a:p>
+            <a:pPr marL="342900" indent="-342900">
+              <a:spcAft>
+                <a:spcPts val="800"/>
+              </a:spcAft>
+              <a:buSzPct val="100000"/>
+              <a:buChar char="●"/>
+            </a:pPr>
+            <a:r>
+              <a:rPr lang="en-US" sz="1700" dirty="0">
+                <a:solidFill>
+                  <a:srgbClr val="222222"/>
+                </a:solidFill>
+                <a:latin typeface="Calibri" pitchFamily="34" charset="0"/>
+                <a:ea typeface="Calibri" pitchFamily="34" charset="-122"/>
+                <a:cs typeface="Calibri" pitchFamily="34" charset="-120"/>
+              </a:rPr>
+              <a:t>Angol nyelvű bemutató</a:t>
+            </a:r>
+            <a:endParaRPr lang="en-US" sz="1700" dirty="0"/>
+          </a:p>
+        </p:txBody>
+      </p:sp>
+    </p:spTree>
+  </p:cSld>
+  <p:clrMapOvr>
+    <a:masterClrMapping/>
+  </p:clrMapOvr>
+</p:sld>
+</file>
+
+<file path=ppt/slides/slide4.xml><?xml version="1.0" encoding="utf-8"?>
+<p:sld xmlns:a="http://schemas.openxmlformats.org/drawingml/2006/main" xmlns:r="http://schemas.openxmlformats.org/officeDocument/2006/relationships" xmlns:p="http://schemas.openxmlformats.org/presentationml/2006/main">
   <p:cSld name="Slide 3">
     <p:bg>
       <p:bgPr>
@@ -1742,7 +2275,7 @@
 </p:sld>
 </file>
 
-<file path=ppt/slides/slide4.xml><?xml version="1.0" encoding="utf-8"?>
+<file path=ppt/slides/slide5.xml><?xml version="1.0" encoding="utf-8"?>
 <p:sld xmlns:a="http://schemas.openxmlformats.org/drawingml/2006/main" xmlns:r="http://schemas.openxmlformats.org/officeDocument/2006/relationships" xmlns:p="http://schemas.openxmlformats.org/presentationml/2006/main">
   <p:cSld name="Slide 4">
     <p:bg>
@@ -1995,7 +2528,7 @@
 </p:sld>
 </file>
 
-<file path=ppt/slides/slide5.xml><?xml version="1.0" encoding="utf-8"?>
+<file path=ppt/slides/slide6.xml><?xml version="1.0" encoding="utf-8"?>
 <p:sld xmlns:a="http://schemas.openxmlformats.org/drawingml/2006/main" xmlns:r="http://schemas.openxmlformats.org/officeDocument/2006/relationships" xmlns:p="http://schemas.openxmlformats.org/presentationml/2006/main">
   <p:cSld name="Slide 5">
     <p:bg>
@@ -2216,539 +2749,6 @@
               <a:t>Közösen: GitHub-használat, tesztelés és a dokumentáció</a:t>
             </a:r>
             <a:endParaRPr lang="en-US" sz="1900" dirty="0"/>
-          </a:p>
-        </p:txBody>
-      </p:sp>
-    </p:spTree>
-  </p:cSld>
-  <p:clrMapOvr>
-    <a:masterClrMapping/>
-  </p:clrMapOvr>
-</p:sld>
-</file>
-
-<file path=ppt/slides/slide6.xml><?xml version="1.0" encoding="utf-8"?>
-<p:sld xmlns:a="http://schemas.openxmlformats.org/drawingml/2006/main" xmlns:r="http://schemas.openxmlformats.org/officeDocument/2006/relationships" xmlns:p="http://schemas.openxmlformats.org/presentationml/2006/main">
-  <p:cSld name="Slide 6">
-    <p:bg>
-      <p:bgPr>
-        <a:solidFill>
-          <a:srgbClr val="EEF4F0"/>
-        </a:solidFill>
-        <a:effectLst/>
-      </p:bgPr>
-    </p:bg>
-    <p:spTree>
-      <p:nvGrpSpPr>
-        <p:cNvPr id="1" name=""/>
-        <p:cNvGrpSpPr/>
-        <p:nvPr/>
-      </p:nvGrpSpPr>
-      <p:grpSpPr>
-        <a:xfrm>
-          <a:off x="0" y="0"/>
-          <a:ext cx="0" cy="0"/>
-          <a:chOff x="0" y="0"/>
-          <a:chExt cx="0" cy="0"/>
-        </a:xfrm>
-      </p:grpSpPr>
-      <p:sp>
-        <p:nvSpPr>
-          <p:cNvPr id="2" name="Shape 0"/>
-          <p:cNvSpPr/>
-          <p:nvPr/>
-        </p:nvSpPr>
-        <p:spPr>
-          <a:xfrm>
-            <a:off x="0" y="0"/>
-            <a:ext cx="9144000" cy="164592"/>
-          </a:xfrm>
-          <a:prstGeom prst="rect">
-            <a:avLst/>
-          </a:prstGeom>
-          <a:solidFill>
-            <a:srgbClr val="1F5F46"/>
-          </a:solidFill>
-          <a:ln w="12700">
-            <a:solidFill>
-              <a:srgbClr val="1F5F46"/>
-            </a:solidFill>
-            <a:prstDash val="solid"/>
-          </a:ln>
-        </p:spPr>
-      </p:sp>
-      <p:sp>
-        <p:nvSpPr>
-          <p:cNvPr id="3" name="Text 1"/>
-          <p:cNvSpPr/>
-          <p:nvPr/>
-        </p:nvSpPr>
-        <p:spPr>
-          <a:xfrm>
-            <a:off x="548640" y="411480"/>
-            <a:ext cx="8046720" cy="822960"/>
-          </a:xfrm>
-          <a:prstGeom prst="rect">
-            <a:avLst/>
-          </a:prstGeom>
-          <a:noFill/>
-          <a:ln/>
-        </p:spPr>
-        <p:txBody>
-          <a:bodyPr wrap="square" lIns="0" tIns="0" rIns="0" bIns="0" rtlCol="0" anchor="ctr"/>
-          <a:lstStyle/>
-          <a:p>
-            <a:pPr marL="0" indent="0">
-              <a:buNone/>
-            </a:pPr>
-            <a:r>
-              <a:rPr lang="en-US" sz="3400" b="1" dirty="0">
-                <a:solidFill>
-                  <a:srgbClr val="1F5F46"/>
-                </a:solidFill>
-                <a:latin typeface="Calibri" pitchFamily="34" charset="0"/>
-                <a:ea typeface="Calibri" pitchFamily="34" charset="-122"/>
-                <a:cs typeface="Calibri" pitchFamily="34" charset="-120"/>
-              </a:rPr>
-              <a:t>Hol tartunk most?</a:t>
-            </a:r>
-            <a:endParaRPr lang="en-US" sz="3400" dirty="0"/>
-          </a:p>
-        </p:txBody>
-      </p:sp>
-      <p:sp>
-        <p:nvSpPr>
-          <p:cNvPr id="4" name="Shape 2"/>
-          <p:cNvSpPr/>
-          <p:nvPr/>
-        </p:nvSpPr>
-        <p:spPr>
-          <a:xfrm>
-            <a:off x="548640" y="1234440"/>
-            <a:ext cx="1097280" cy="64008"/>
-          </a:xfrm>
-          <a:prstGeom prst="rect">
-            <a:avLst/>
-          </a:prstGeom>
-          <a:solidFill>
-            <a:srgbClr val="F28C28"/>
-          </a:solidFill>
-          <a:ln w="12700">
-            <a:solidFill>
-              <a:srgbClr val="F28C28"/>
-            </a:solidFill>
-            <a:prstDash val="solid"/>
-          </a:ln>
-        </p:spPr>
-      </p:sp>
-      <p:sp>
-        <p:nvSpPr>
-          <p:cNvPr id="5" name="Shape 3"/>
-          <p:cNvSpPr/>
-          <p:nvPr/>
-        </p:nvSpPr>
-        <p:spPr>
-          <a:xfrm>
-            <a:off x="548640" y="1554480"/>
-            <a:ext cx="3931920" cy="502920"/>
-          </a:xfrm>
-          <a:prstGeom prst="rect">
-            <a:avLst/>
-          </a:prstGeom>
-          <a:solidFill>
-            <a:srgbClr val="1F5F46"/>
-          </a:solidFill>
-          <a:ln w="12700">
-            <a:solidFill>
-              <a:srgbClr val="1F5F46"/>
-            </a:solidFill>
-            <a:prstDash val="solid"/>
-          </a:ln>
-        </p:spPr>
-      </p:sp>
-      <p:sp>
-        <p:nvSpPr>
-          <p:cNvPr id="6" name="Text 4"/>
-          <p:cNvSpPr/>
-          <p:nvPr/>
-        </p:nvSpPr>
-        <p:spPr>
-          <a:xfrm>
-            <a:off x="731520" y="1554480"/>
-            <a:ext cx="3566160" cy="502920"/>
-          </a:xfrm>
-          <a:prstGeom prst="rect">
-            <a:avLst/>
-          </a:prstGeom>
-          <a:noFill/>
-          <a:ln/>
-        </p:spPr>
-        <p:txBody>
-          <a:bodyPr wrap="square" lIns="0" tIns="0" rIns="0" bIns="0" rtlCol="0" anchor="ctr"/>
-          <a:lstStyle/>
-          <a:p>
-            <a:pPr marL="0" indent="0">
-              <a:buNone/>
-            </a:pPr>
-            <a:r>
-              <a:rPr lang="en-US" sz="2000" b="1" dirty="0">
-                <a:solidFill>
-                  <a:srgbClr val="FFFFFF"/>
-                </a:solidFill>
-                <a:latin typeface="Calibri" pitchFamily="34" charset="0"/>
-                <a:ea typeface="Calibri" pitchFamily="34" charset="-122"/>
-                <a:cs typeface="Calibri" pitchFamily="34" charset="-120"/>
-              </a:rPr>
-              <a:t>Már megvan</a:t>
-            </a:r>
-            <a:endParaRPr lang="en-US" sz="2000" dirty="0"/>
-          </a:p>
-        </p:txBody>
-      </p:sp>
-      <p:sp>
-        <p:nvSpPr>
-          <p:cNvPr id="7" name="Shape 5"/>
-          <p:cNvSpPr/>
-          <p:nvPr/>
-        </p:nvSpPr>
-        <p:spPr>
-          <a:xfrm>
-            <a:off x="548640" y="2057400"/>
-            <a:ext cx="3931920" cy="2697480"/>
-          </a:xfrm>
-          <a:prstGeom prst="rect">
-            <a:avLst/>
-          </a:prstGeom>
-          <a:solidFill>
-            <a:srgbClr val="FFFFFF"/>
-          </a:solidFill>
-          <a:ln w="12700">
-            <a:solidFill>
-              <a:srgbClr val="C9D8CF"/>
-            </a:solidFill>
-            <a:prstDash val="solid"/>
-          </a:ln>
-        </p:spPr>
-      </p:sp>
-      <p:sp>
-        <p:nvSpPr>
-          <p:cNvPr id="8" name="Text 6"/>
-          <p:cNvSpPr/>
-          <p:nvPr/>
-        </p:nvSpPr>
-        <p:spPr>
-          <a:xfrm>
-            <a:off x="731520" y="2194560"/>
-            <a:ext cx="3566160" cy="2468880"/>
-          </a:xfrm>
-          <a:prstGeom prst="rect">
-            <a:avLst/>
-          </a:prstGeom>
-          <a:noFill/>
-          <a:ln/>
-        </p:spPr>
-        <p:txBody>
-          <a:bodyPr wrap="square" lIns="0" tIns="0" rIns="0" bIns="0" rtlCol="0" anchor="t"/>
-          <a:lstStyle/>
-          <a:p>
-            <a:pPr marL="342900" indent="-342900">
-              <a:spcAft>
-                <a:spcPts val="800"/>
-              </a:spcAft>
-              <a:buSzPct val="100000"/>
-              <a:buChar char="●"/>
-            </a:pPr>
-            <a:r>
-              <a:rPr lang="en-US" sz="1700" dirty="0">
-                <a:solidFill>
-                  <a:srgbClr val="222222"/>
-                </a:solidFill>
-                <a:latin typeface="Calibri" pitchFamily="34" charset="0"/>
-                <a:ea typeface="Calibri" pitchFamily="34" charset="-122"/>
-                <a:cs typeface="Calibri" pitchFamily="34" charset="-120"/>
-              </a:rPr>
-              <a:t>GitHub tároló létrehozva</a:t>
-            </a:r>
-            <a:endParaRPr lang="en-US" sz="1700" dirty="0"/>
-          </a:p>
-          <a:p>
-            <a:pPr marL="342900" indent="-342900">
-              <a:spcAft>
-                <a:spcPts val="800"/>
-              </a:spcAft>
-              <a:buSzPct val="100000"/>
-              <a:buChar char="●"/>
-            </a:pPr>
-            <a:r>
-              <a:rPr lang="en-US" sz="1700" dirty="0">
-                <a:solidFill>
-                  <a:srgbClr val="222222"/>
-                </a:solidFill>
-                <a:latin typeface="Calibri" pitchFamily="34" charset="0"/>
-                <a:ea typeface="Calibri" pitchFamily="34" charset="-122"/>
-                <a:cs typeface="Calibri" pitchFamily="34" charset="-120"/>
-              </a:rPr>
-              <a:t>Adatbázis megtervezve (7 tábla)</a:t>
-            </a:r>
-            <a:endParaRPr lang="en-US" sz="1700" dirty="0"/>
-          </a:p>
-          <a:p>
-            <a:pPr marL="342900" indent="-342900">
-              <a:spcAft>
-                <a:spcPts val="800"/>
-              </a:spcAft>
-              <a:buSzPct val="100000"/>
-              <a:buChar char="●"/>
-            </a:pPr>
-            <a:r>
-              <a:rPr lang="en-US" sz="1700" dirty="0">
-                <a:solidFill>
-                  <a:srgbClr val="222222"/>
-                </a:solidFill>
-                <a:latin typeface="Calibri" pitchFamily="34" charset="0"/>
-                <a:ea typeface="Calibri" pitchFamily="34" charset="-122"/>
-                <a:cs typeface="Calibri" pitchFamily="34" charset="-120"/>
-              </a:rPr>
-              <a:t>Kapcsolatok és EER diagram kész</a:t>
-            </a:r>
-            <a:endParaRPr lang="en-US" sz="1700" dirty="0"/>
-          </a:p>
-          <a:p>
-            <a:pPr marL="342900" indent="-342900">
-              <a:spcAft>
-                <a:spcPts val="800"/>
-              </a:spcAft>
-              <a:buSzPct val="100000"/>
-              <a:buChar char="●"/>
-            </a:pPr>
-            <a:r>
-              <a:rPr lang="en-US" sz="1700" dirty="0">
-                <a:solidFill>
-                  <a:srgbClr val="222222"/>
-                </a:solidFill>
-                <a:latin typeface="Calibri" pitchFamily="34" charset="0"/>
-                <a:ea typeface="Calibri" pitchFamily="34" charset="-122"/>
-                <a:cs typeface="Calibri" pitchFamily="34" charset="-120"/>
-              </a:rPr>
-              <a:t>Tesztadatok feltöltve</a:t>
-            </a:r>
-            <a:endParaRPr lang="en-US" sz="1700" dirty="0"/>
-          </a:p>
-        </p:txBody>
-      </p:sp>
-      <p:sp>
-        <p:nvSpPr>
-          <p:cNvPr id="9" name="Shape 7"/>
-          <p:cNvSpPr/>
-          <p:nvPr/>
-        </p:nvSpPr>
-        <p:spPr>
-          <a:xfrm>
-            <a:off x="4663440" y="1554480"/>
-            <a:ext cx="3931920" cy="502920"/>
-          </a:xfrm>
-          <a:prstGeom prst="rect">
-            <a:avLst/>
-          </a:prstGeom>
-          <a:solidFill>
-            <a:srgbClr val="F28C28"/>
-          </a:solidFill>
-          <a:ln w="12700">
-            <a:solidFill>
-              <a:srgbClr val="F28C28"/>
-            </a:solidFill>
-            <a:prstDash val="solid"/>
-          </a:ln>
-        </p:spPr>
-      </p:sp>
-      <p:sp>
-        <p:nvSpPr>
-          <p:cNvPr id="10" name="Text 8"/>
-          <p:cNvSpPr/>
-          <p:nvPr/>
-        </p:nvSpPr>
-        <p:spPr>
-          <a:xfrm>
-            <a:off x="4846320" y="1554480"/>
-            <a:ext cx="3566160" cy="502920"/>
-          </a:xfrm>
-          <a:prstGeom prst="rect">
-            <a:avLst/>
-          </a:prstGeom>
-          <a:noFill/>
-          <a:ln/>
-        </p:spPr>
-        <p:txBody>
-          <a:bodyPr wrap="square" lIns="0" tIns="0" rIns="0" bIns="0" rtlCol="0" anchor="ctr"/>
-          <a:lstStyle/>
-          <a:p>
-            <a:pPr marL="0" indent="0">
-              <a:buNone/>
-            </a:pPr>
-            <a:r>
-              <a:rPr lang="en-US" sz="2000" b="1" dirty="0">
-                <a:solidFill>
-                  <a:srgbClr val="FFFFFF"/>
-                </a:solidFill>
-                <a:latin typeface="Calibri" pitchFamily="34" charset="0"/>
-                <a:ea typeface="Calibri" pitchFamily="34" charset="-122"/>
-                <a:cs typeface="Calibri" pitchFamily="34" charset="-120"/>
-              </a:rPr>
-              <a:t>Még hátra van</a:t>
-            </a:r>
-            <a:endParaRPr lang="en-US" sz="2000" dirty="0"/>
-          </a:p>
-        </p:txBody>
-      </p:sp>
-      <p:sp>
-        <p:nvSpPr>
-          <p:cNvPr id="11" name="Shape 9"/>
-          <p:cNvSpPr/>
-          <p:nvPr/>
-        </p:nvSpPr>
-        <p:spPr>
-          <a:xfrm>
-            <a:off x="4663440" y="2057400"/>
-            <a:ext cx="3931920" cy="2697480"/>
-          </a:xfrm>
-          <a:prstGeom prst="rect">
-            <a:avLst/>
-          </a:prstGeom>
-          <a:solidFill>
-            <a:srgbClr val="FFFFFF"/>
-          </a:solidFill>
-          <a:ln w="12700">
-            <a:solidFill>
-              <a:srgbClr val="C9D8CF"/>
-            </a:solidFill>
-            <a:prstDash val="solid"/>
-          </a:ln>
-        </p:spPr>
-      </p:sp>
-      <p:sp>
-        <p:nvSpPr>
-          <p:cNvPr id="12" name="Text 10"/>
-          <p:cNvSpPr/>
-          <p:nvPr/>
-        </p:nvSpPr>
-        <p:spPr>
-          <a:xfrm>
-            <a:off x="4846320" y="2194560"/>
-            <a:ext cx="3566160" cy="2468880"/>
-          </a:xfrm>
-          <a:prstGeom prst="rect">
-            <a:avLst/>
-          </a:prstGeom>
-          <a:noFill/>
-          <a:ln/>
-        </p:spPr>
-        <p:txBody>
-          <a:bodyPr wrap="square" lIns="0" tIns="0" rIns="0" bIns="0" rtlCol="0" anchor="t"/>
-          <a:lstStyle/>
-          <a:p>
-            <a:pPr marL="342900" indent="-342900">
-              <a:spcAft>
-                <a:spcPts val="800"/>
-              </a:spcAft>
-              <a:buSzPct val="100000"/>
-              <a:buChar char="●"/>
-            </a:pPr>
-            <a:r>
-              <a:rPr lang="en-US" sz="1700" dirty="0">
-                <a:solidFill>
-                  <a:srgbClr val="222222"/>
-                </a:solidFill>
-                <a:latin typeface="Calibri" pitchFamily="34" charset="0"/>
-                <a:ea typeface="Calibri" pitchFamily="34" charset="-122"/>
-                <a:cs typeface="Calibri" pitchFamily="34" charset="-120"/>
-              </a:rPr>
-              <a:t>REST API (belépés, jogosultságok)</a:t>
-            </a:r>
-            <a:endParaRPr lang="en-US" sz="1700" dirty="0"/>
-          </a:p>
-          <a:p>
-            <a:pPr marL="342900" indent="-342900">
-              <a:spcAft>
-                <a:spcPts val="800"/>
-              </a:spcAft>
-              <a:buSzPct val="100000"/>
-              <a:buChar char="●"/>
-            </a:pPr>
-            <a:r>
-              <a:rPr lang="en-US" sz="1700" dirty="0">
-                <a:solidFill>
-                  <a:srgbClr val="222222"/>
-                </a:solidFill>
-                <a:latin typeface="Calibri" pitchFamily="34" charset="0"/>
-                <a:ea typeface="Calibri" pitchFamily="34" charset="-122"/>
-                <a:cs typeface="Calibri" pitchFamily="34" charset="-120"/>
-              </a:rPr>
-              <a:t>Weboldal: edzői és szülői felület</a:t>
-            </a:r>
-            <a:endParaRPr lang="en-US" sz="1700" dirty="0"/>
-          </a:p>
-          <a:p>
-            <a:pPr marL="342900" indent="-342900">
-              <a:spcAft>
-                <a:spcPts val="800"/>
-              </a:spcAft>
-              <a:buSzPct val="100000"/>
-              <a:buChar char="●"/>
-            </a:pPr>
-            <a:r>
-              <a:rPr lang="en-US" sz="1700" dirty="0">
-                <a:solidFill>
-                  <a:srgbClr val="222222"/>
-                </a:solidFill>
-                <a:latin typeface="Calibri" pitchFamily="34" charset="0"/>
-                <a:ea typeface="Calibri" pitchFamily="34" charset="-122"/>
-                <a:cs typeface="Calibri" pitchFamily="34" charset="-120"/>
-              </a:rPr>
-              <a:t>Tesztelés</a:t>
-            </a:r>
-            <a:endParaRPr lang="en-US" sz="1700" dirty="0"/>
-          </a:p>
-          <a:p>
-            <a:pPr marL="342900" indent="-342900">
-              <a:spcAft>
-                <a:spcPts val="800"/>
-              </a:spcAft>
-              <a:buSzPct val="100000"/>
-              <a:buChar char="●"/>
-            </a:pPr>
-            <a:r>
-              <a:rPr lang="en-US" sz="1700" dirty="0">
-                <a:solidFill>
-                  <a:srgbClr val="222222"/>
-                </a:solidFill>
-                <a:latin typeface="Calibri" pitchFamily="34" charset="0"/>
-                <a:ea typeface="Calibri" pitchFamily="34" charset="-122"/>
-                <a:cs typeface="Calibri" pitchFamily="34" charset="-120"/>
-              </a:rPr>
-              <a:t>Dokumentáció</a:t>
-            </a:r>
-            <a:endParaRPr lang="en-US" sz="1700" dirty="0"/>
-          </a:p>
-          <a:p>
-            <a:pPr marL="342900" indent="-342900">
-              <a:spcAft>
-                <a:spcPts val="800"/>
-              </a:spcAft>
-              <a:buSzPct val="100000"/>
-              <a:buChar char="●"/>
-            </a:pPr>
-            <a:r>
-              <a:rPr lang="en-US" sz="1700" dirty="0">
-                <a:solidFill>
-                  <a:srgbClr val="222222"/>
-                </a:solidFill>
-                <a:latin typeface="Calibri" pitchFamily="34" charset="0"/>
-                <a:ea typeface="Calibri" pitchFamily="34" charset="-122"/>
-                <a:cs typeface="Calibri" pitchFamily="34" charset="-120"/>
-              </a:rPr>
-              <a:t>Angol nyelvű bemutató</a:t>
-            </a:r>
-            <a:endParaRPr lang="en-US" sz="1700" dirty="0"/>
           </a:p>
         </p:txBody>
       </p:sp>
